--- a/docs/Week5_AA_Testing_Summary.pptx
+++ b/docs/Week5_AA_Testing_Summary.pptx
@@ -5322,19 +5322,8 @@
           </a:bodyPr>
           <a:lstStyle/>
           <a:p>
-            <a:pPr>
-              <a:spcAft>
-                <a:spcPts val="600"/>
-              </a:spcAft>
-              <a:defRPr sz="1500">
-                <a:solidFill>
-                  <a:srgbClr val="FFFFFF"/>
-                </a:solidFill>
-                <a:latin typeface="Segoe UI"/>
-              </a:defRPr>
-            </a:pPr>
-            <a:r>
-              <a:t>• Tỷ lệ hệ thống kết luận nhầm "Có khác biệt" duy trì ở mức ~4.74% (Sát với ngưỡng lý tưởng 5%).</a:t>
+            <a:r>
+              <a:t>• Tỷ lệ hệ thống kết luận nhầm "Có khác biệt" duy trì ở mức ~4.80% (Sát với ngưỡng lý tưởng 5%).</a:t>
             </a:r>
           </a:p>
         </p:txBody>
